--- a/dist/초3/과학/건강과탐구/초3_과학_건강과탐구_02_감염병예방_학생용.pptx
+++ b/dist/초3/과학/건강과탐구/초3_과학_건강과탐구_02_감염병예방_학생용.pptx
@@ -122,13 +122,13 @@
   <p:extLst>
     <p:ext uri="{521415D9-36F7-43E2-AB2F-B90AF26B5E84}">
       <p14:sectionLst xmlns:p14="http://schemas.microsoft.com/office/powerpoint/2010/main">
-        <p14:section name="도입" id="{77ce41d8-5897-4766-0a04-561b00943709}">
+        <p14:section name="도입" id="{f6c2f679-51fb-9644-733a-d24930f9067f}">
           <p14:sldIdLst>
             <p14:sldId id="256"/>
             <p14:sldId id="257"/>
           </p14:sldIdLst>
         </p14:section>
-        <p14:section name="개념" id="{687e8cef-9b40-7d01-2ffc-e4a0e6529dd0}">
+        <p14:section name="개념" id="{87f3bd3b-2267-e9eb-9852-dc7cd72d7948}">
           <p14:sldIdLst>
             <p14:sldId id="258"/>
             <p14:sldId id="263"/>
@@ -137,7 +137,7 @@
             <p14:sldId id="266"/>
           </p14:sldIdLst>
         </p14:section>
-        <p14:section name="연습" id="{1a4a01f4-5fb3-c477-258d-1e876569b1f1}">
+        <p14:section name="연습" id="{afff0d60-6d06-5a55-6b74-ec61aa1aa9b2}">
           <p14:sldIdLst>
             <p14:sldId id="259"/>
             <p14:sldId id="260"/>
@@ -146,24 +146,24 @@
             <p14:sldId id="267"/>
           </p14:sldIdLst>
         </p14:section>
-        <p14:section name="개념" id="{36946361-2f51-fdf1-6ddc-58a5b5ca0140}">
+        <p14:section name="개념" id="{d1e67b53-80b9-b476-6ad2-0b1c7b759bd3}">
           <p14:sldIdLst/>
         </p14:section>
-        <p14:section name="연습" id="{9869c330-e068-27ba-76bf-2f681b41d9d0}">
+        <p14:section name="연습" id="{8c811064-e63c-7ff1-4d1c-79ad007d0d1d}">
           <p14:sldIdLst/>
         </p14:section>
-        <p14:section name="확인" id="{73360811-3d06-3b7d-c4fd-4c49eb6eec34}">
+        <p14:section name="확인" id="{f226f6aa-b5c0-25f4-7b9c-8062da7b3590}">
           <p14:sldIdLst>
             <p14:sldId id="268"/>
             <p14:sldId id="269"/>
           </p14:sldIdLst>
         </p14:section>
-        <p14:section name="정리" id="{a0393cdf-abfe-7429-4f87-47cfdcad4e49}">
+        <p14:section name="정리" id="{c227b2d7-166a-185f-55c7-2c1fc3463007}">
           <p14:sldIdLst>
             <p14:sldId id="270"/>
           </p14:sldIdLst>
         </p14:section>
-        <p14:section name="보충" id="{cbb45f3b-9ee9-2d9d-ee1e-e337fb46f194}">
+        <p14:section name="보충" id="{a50f6e2e-7c9e-e6eb-6ed1-3e9606181b1c}">
           <p14:sldIdLst>
             <p14:sldId id="271"/>
           </p14:sldIdLst>
